--- a/dist/초5/수학/도형과측정/초5_수학_도형과측정_05_다각형의둘레.pptx
+++ b/dist/초5/수학/도형과측정/초5_수학_도형과측정_05_다각형의둘레.pptx
@@ -120,13 +120,13 @@
   <p:extLst>
     <p:ext uri="{521415D9-36F7-43E2-AB2F-B90AF26B5E84}">
       <p14:sectionLst xmlns:p14="http://schemas.microsoft.com/office/powerpoint/2010/main">
-        <p14:section name="도입" id="{8cc256bc-b76f-1872-f01a-37359d173452}">
+        <p14:section name="도입" id="{e631da95-ead9-5fb9-70c6-cba481b96cfb}">
           <p14:sldIdLst>
             <p14:sldId id="256"/>
             <p14:sldId id="257"/>
           </p14:sldIdLst>
         </p14:section>
-        <p14:section name="개념" id="{151cba2a-dfc2-e36c-5a63-582514931c12}">
+        <p14:section name="개념" id="{edd51cf3-d1f4-8750-0a92-552db02cf6da}">
           <p14:sldIdLst>
             <p14:sldId id="258"/>
             <p14:sldId id="259"/>
@@ -134,32 +134,32 @@
             <p14:sldId id="262"/>
           </p14:sldIdLst>
         </p14:section>
-        <p14:section name="연습" id="{74e005e9-d2b0-8a10-62fa-f3ebc230e0f2}">
+        <p14:section name="연습" id="{38ee35b5-cf8a-573b-903b-86b50e28b280}">
           <p14:sldIdLst>
             <p14:sldId id="260"/>
             <p14:sldId id="263"/>
             <p14:sldId id="264"/>
           </p14:sldIdLst>
         </p14:section>
-        <p14:section name="개념" id="{2c3c2cb3-1b86-a738-cb18-e8dbb0d38b2d}">
+        <p14:section name="개념" id="{cd8f5949-c971-0508-4249-14159605d98f}">
           <p14:sldIdLst/>
         </p14:section>
-        <p14:section name="연습" id="{465398d3-d350-b9fb-5f4f-302313f2c413}">
+        <p14:section name="연습" id="{6a03130f-8785-d4d5-c0ba-2aad3991e41c}">
           <p14:sldIdLst/>
         </p14:section>
-        <p14:section name="확인" id="{a5e9f207-3bf6-2cf9-78ae-01da434569a4}">
+        <p14:section name="확인" id="{b82b1317-ed7d-a46d-6ff2-33db35b74650}">
           <p14:sldIdLst>
             <p14:sldId id="265"/>
             <p14:sldId id="266"/>
             <p14:sldId id="267"/>
           </p14:sldIdLst>
         </p14:section>
-        <p14:section name="정리" id="{ed29a60d-efd5-c779-db25-645c5f02bc4f}">
+        <p14:section name="정리" id="{3a239d01-8db7-5772-f8e3-f634760e97fa}">
           <p14:sldIdLst>
             <p14:sldId id="268"/>
           </p14:sldIdLst>
         </p14:section>
-        <p14:section name="보충" id="{fab35c3c-1b5f-39a0-1ddd-b9cebdd19ed1}">
+        <p14:section name="보충" id="{583f0aee-c802-d20a-294d-4d50b3003aaf}">
           <p14:sldIdLst>
             <p14:sldId id="269"/>
           </p14:sldIdLst>
@@ -3422,8 +3422,8 @@
         </p:nvSpPr>
         <p:spPr>
           <a:xfrm>
-            <a:off x="6654546" y="2774105"/>
-            <a:ext cx="4608576" cy="1995590"/>
+            <a:off x="6778041" y="2827580"/>
+            <a:ext cx="4361586" cy="1888640"/>
           </a:xfrm>
           <a:custGeom>
             <a:avLst/>
@@ -3432,18 +3432,18 @@
             <a:cxnLst/>
             <a:rect l="l" t="t" r="r" b="b"/>
             <a:pathLst>
-              <a:path w="4608576" h="1995590">
+              <a:path w="4361586" h="1888640">
                 <a:moveTo>
-                  <a:pt x="0" y="1995590"/>
+                  <a:pt x="0" y="1888640"/>
                 </a:moveTo>
                 <a:lnTo>
-                  <a:pt x="3456432" y="1995590"/>
+                  <a:pt x="3271190" y="1888640"/>
                 </a:lnTo>
                 <a:lnTo>
-                  <a:pt x="4608576" y="0"/>
+                  <a:pt x="4361586" y="0"/>
                 </a:lnTo>
                 <a:lnTo>
-                  <a:pt x="1152144" y="0"/>
+                  <a:pt x="1090397" y="0"/>
                 </a:lnTo>
                 <a:close/>
               </a:path>
@@ -3468,7 +3468,7 @@
         </p:nvSpPr>
         <p:spPr>
           <a:xfrm flipV="1">
-            <a:off x="8382762" y="4685875"/>
+            <a:off x="8413636" y="4632400"/>
             <a:ext cx="0" cy="167640"/>
           </a:xfrm>
           <a:prstGeom prst="line">
@@ -3491,7 +3491,7 @@
         </p:nvSpPr>
         <p:spPr>
           <a:xfrm>
-            <a:off x="8001000" y="4846530"/>
+            <a:off x="8031874" y="4793055"/>
             <a:ext cx="763524" cy="349250"/>
           </a:xfrm>
           <a:prstGeom prst="rect">
@@ -3530,7 +3530,7 @@
         </p:nvSpPr>
         <p:spPr>
           <a:xfrm flipH="1" flipV="1">
-            <a:off x="10594902" y="3763866"/>
+            <a:off x="10502281" y="3763866"/>
             <a:ext cx="145181" cy="83819"/>
           </a:xfrm>
           <a:prstGeom prst="line">
@@ -3553,7 +3553,7 @@
         </p:nvSpPr>
         <p:spPr>
           <a:xfrm flipH="1" flipV="1">
-            <a:off x="10634017" y="3696115"/>
+            <a:off x="10541396" y="3696115"/>
             <a:ext cx="145181" cy="83819"/>
           </a:xfrm>
           <a:prstGeom prst="line">
@@ -3576,7 +3576,7 @@
         </p:nvSpPr>
         <p:spPr>
           <a:xfrm>
-            <a:off x="10710312" y="3831113"/>
+            <a:off x="10617690" y="3831113"/>
             <a:ext cx="763524" cy="349250"/>
           </a:xfrm>
           <a:prstGeom prst="rect">
@@ -3615,7 +3615,7 @@
         </p:nvSpPr>
         <p:spPr>
           <a:xfrm>
-            <a:off x="9534906" y="2690285"/>
+            <a:off x="9504032" y="2743760"/>
             <a:ext cx="0" cy="167640"/>
           </a:xfrm>
           <a:prstGeom prst="line">
@@ -3638,7 +3638,7 @@
         </p:nvSpPr>
         <p:spPr>
           <a:xfrm>
-            <a:off x="7177585" y="3696115"/>
+            <a:off x="7270207" y="3696115"/>
             <a:ext cx="145181" cy="83819"/>
           </a:xfrm>
           <a:prstGeom prst="line">
@@ -3661,7 +3661,7 @@
         </p:nvSpPr>
         <p:spPr>
           <a:xfrm>
-            <a:off x="7138470" y="3763866"/>
+            <a:off x="7231091" y="3763866"/>
             <a:ext cx="145181" cy="83819"/>
           </a:xfrm>
           <a:prstGeom prst="line">
@@ -8270,8 +8270,8 @@
         </p:nvSpPr>
         <p:spPr>
           <a:xfrm>
-            <a:off x="1536192" y="1796126"/>
-            <a:ext cx="1508760" cy="1306647"/>
+            <a:off x="1564048" y="1820250"/>
+            <a:ext cx="1453048" cy="1258397"/>
           </a:xfrm>
           <a:custGeom>
             <a:avLst/>
@@ -8280,15 +8280,15 @@
             <a:cxnLst/>
             <a:rect l="l" t="t" r="r" b="b"/>
             <a:pathLst>
-              <a:path w="1508760" h="1306647">
+              <a:path w="1453048" h="1258397">
                 <a:moveTo>
-                  <a:pt x="0" y="1306647"/>
+                  <a:pt x="0" y="1258397"/>
                 </a:moveTo>
                 <a:lnTo>
-                  <a:pt x="1508760" y="1306647"/>
+                  <a:pt x="1453048" y="1258397"/>
                 </a:lnTo>
                 <a:lnTo>
-                  <a:pt x="754380" y="0"/>
+                  <a:pt x="726524" y="0"/>
                 </a:lnTo>
                 <a:close/>
               </a:path>
@@ -8313,7 +8313,7 @@
         </p:nvSpPr>
         <p:spPr>
           <a:xfrm flipV="1">
-            <a:off x="2290572" y="3018952"/>
+            <a:off x="2290572" y="2994828"/>
             <a:ext cx="0" cy="167640"/>
           </a:xfrm>
           <a:prstGeom prst="line">
@@ -8336,7 +8336,7 @@
         </p:nvSpPr>
         <p:spPr>
           <a:xfrm>
-            <a:off x="1908810" y="3179607"/>
+            <a:off x="1908810" y="3155483"/>
             <a:ext cx="763524" cy="349250"/>
           </a:xfrm>
           <a:prstGeom prst="rect">
@@ -8375,7 +8375,7 @@
         </p:nvSpPr>
         <p:spPr>
           <a:xfrm flipH="1">
-            <a:off x="2595171" y="2407540"/>
+            <a:off x="2581243" y="2407540"/>
             <a:ext cx="145181" cy="83819"/>
           </a:xfrm>
           <a:prstGeom prst="line">
@@ -8398,7 +8398,7 @@
         </p:nvSpPr>
         <p:spPr>
           <a:xfrm>
-            <a:off x="1840791" y="2407540"/>
+            <a:off x="1854720" y="2407540"/>
             <a:ext cx="145181" cy="83819"/>
           </a:xfrm>
           <a:prstGeom prst="line">
@@ -8676,8 +8676,8 @@
         </p:nvSpPr>
         <p:spPr>
           <a:xfrm>
-            <a:off x="8993124" y="1665467"/>
-            <a:ext cx="1810512" cy="1567964"/>
+            <a:off x="9171851" y="1820250"/>
+            <a:ext cx="1453059" cy="1258397"/>
           </a:xfrm>
           <a:custGeom>
             <a:avLst/>
@@ -8686,24 +8686,24 @@
             <a:cxnLst/>
             <a:rect l="l" t="t" r="r" b="b"/>
             <a:pathLst>
-              <a:path w="1810512" h="1567964">
+              <a:path w="1453059" h="1258397">
                 <a:moveTo>
-                  <a:pt x="452628" y="1567964"/>
+                  <a:pt x="363265" y="1258397"/>
                 </a:moveTo>
                 <a:lnTo>
-                  <a:pt x="1357884" y="1567964"/>
+                  <a:pt x="1089794" y="1258397"/>
                 </a:lnTo>
                 <a:lnTo>
-                  <a:pt x="1810512" y="783982"/>
+                  <a:pt x="1453059" y="629199"/>
                 </a:lnTo>
                 <a:lnTo>
-                  <a:pt x="1357884" y="0"/>
+                  <a:pt x="1089794" y="0"/>
                 </a:lnTo>
                 <a:lnTo>
-                  <a:pt x="452628" y="0"/>
+                  <a:pt x="363265" y="0"/>
                 </a:lnTo>
                 <a:lnTo>
-                  <a:pt x="0" y="783982"/>
+                  <a:pt x="0" y="629199"/>
                 </a:lnTo>
                 <a:close/>
               </a:path>
@@ -8728,7 +8728,7 @@
         </p:nvSpPr>
         <p:spPr>
           <a:xfrm flipV="1">
-            <a:off x="9898380" y="3149611"/>
+            <a:off x="9898380" y="2994828"/>
             <a:ext cx="0" cy="167640"/>
           </a:xfrm>
           <a:prstGeom prst="line">
@@ -8751,7 +8751,7 @@
         </p:nvSpPr>
         <p:spPr>
           <a:xfrm>
-            <a:off x="9516618" y="3310266"/>
+            <a:off x="9516618" y="3155483"/>
             <a:ext cx="763524" cy="349250"/>
           </a:xfrm>
           <a:prstGeom prst="rect">
@@ -8790,7 +8790,7 @@
         </p:nvSpPr>
         <p:spPr>
           <a:xfrm flipH="1" flipV="1">
-            <a:off x="10504732" y="2799530"/>
+            <a:off x="10370687" y="2722139"/>
             <a:ext cx="145181" cy="83819"/>
           </a:xfrm>
           <a:prstGeom prst="line">
@@ -8813,7 +8813,7 @@
         </p:nvSpPr>
         <p:spPr>
           <a:xfrm flipH="1">
-            <a:off x="10504732" y="2015548"/>
+            <a:off x="10370687" y="2092940"/>
             <a:ext cx="145181" cy="83819"/>
           </a:xfrm>
           <a:prstGeom prst="line">
@@ -8836,7 +8836,7 @@
         </p:nvSpPr>
         <p:spPr>
           <a:xfrm>
-            <a:off x="9898380" y="1581647"/>
+            <a:off x="9898380" y="1736430"/>
             <a:ext cx="0" cy="167640"/>
           </a:xfrm>
           <a:prstGeom prst="line">
@@ -8859,7 +8859,7 @@
         </p:nvSpPr>
         <p:spPr>
           <a:xfrm>
-            <a:off x="9146848" y="2015548"/>
+            <a:off x="9280893" y="2092940"/>
             <a:ext cx="145181" cy="83819"/>
           </a:xfrm>
           <a:prstGeom prst="line">
@@ -8882,7 +8882,7 @@
         </p:nvSpPr>
         <p:spPr>
           <a:xfrm flipV="1">
-            <a:off x="9146848" y="2799530"/>
+            <a:off x="9280893" y="2722139"/>
             <a:ext cx="145181" cy="83819"/>
           </a:xfrm>
           <a:prstGeom prst="line">
@@ -10861,8 +10861,8 @@
         </p:nvSpPr>
         <p:spPr>
           <a:xfrm>
-            <a:off x="7703820" y="1671955"/>
-            <a:ext cx="2487168" cy="1243584"/>
+            <a:off x="7863393" y="1751741"/>
+            <a:ext cx="2168022" cy="1084011"/>
           </a:xfrm>
           <a:custGeom>
             <a:avLst/>
@@ -10871,18 +10871,18 @@
             <a:cxnLst/>
             <a:rect l="l" t="t" r="r" b="b"/>
             <a:pathLst>
-              <a:path w="2487168" h="1243584">
+              <a:path w="2168022" h="1084011">
                 <a:moveTo>
-                  <a:pt x="0" y="1243584"/>
+                  <a:pt x="0" y="1084011"/>
                 </a:moveTo>
                 <a:lnTo>
-                  <a:pt x="1554480" y="1243584"/>
+                  <a:pt x="1355014" y="1084011"/>
                 </a:lnTo>
                 <a:lnTo>
-                  <a:pt x="2487168" y="0"/>
+                  <a:pt x="2168022" y="0"/>
                 </a:lnTo>
                 <a:lnTo>
-                  <a:pt x="932688" y="0"/>
+                  <a:pt x="813008" y="0"/>
                 </a:lnTo>
                 <a:close/>
               </a:path>
@@ -10907,7 +10907,7 @@
         </p:nvSpPr>
         <p:spPr>
           <a:xfrm flipV="1">
-            <a:off x="8481060" y="2831719"/>
+            <a:off x="8540900" y="2751933"/>
             <a:ext cx="0" cy="167640"/>
           </a:xfrm>
           <a:prstGeom prst="line">
@@ -10930,7 +10930,7 @@
         </p:nvSpPr>
         <p:spPr>
           <a:xfrm>
-            <a:off x="8099298" y="2992374"/>
+            <a:off x="8159138" y="2912588"/>
             <a:ext cx="763524" cy="349250"/>
           </a:xfrm>
           <a:prstGeom prst="rect">
@@ -10969,7 +10969,7 @@
         </p:nvSpPr>
         <p:spPr>
           <a:xfrm flipH="1" flipV="1">
-            <a:off x="9657588" y="2243455"/>
+            <a:off x="9557855" y="2243455"/>
             <a:ext cx="134112" cy="100584"/>
           </a:xfrm>
           <a:prstGeom prst="line">
@@ -10992,7 +10992,7 @@
         </p:nvSpPr>
         <p:spPr>
           <a:xfrm>
-            <a:off x="9413748" y="1588135"/>
+            <a:off x="9353908" y="1667921"/>
             <a:ext cx="0" cy="167640"/>
           </a:xfrm>
           <a:prstGeom prst="line">
@@ -11015,7 +11015,7 @@
         </p:nvSpPr>
         <p:spPr>
           <a:xfrm>
-            <a:off x="8103108" y="2243455"/>
+            <a:off x="8202841" y="2243455"/>
             <a:ext cx="134112" cy="100584"/>
           </a:xfrm>
           <a:prstGeom prst="line">
